--- a/docs/manual/2026_KOHOM뉴스룸_한장요약_설명자료.pptx
+++ b/docs/manual/2026_KOHOM뉴스룸_한장요약_설명자료.pptx
@@ -107,7 +107,7 @@
   <p:extLst>
     <p:ext uri="{521415D9-36F7-43E2-AB2F-B90AF26B5E84}">
       <p14:sectionLst xmlns:p14="http://schemas.microsoft.com/office/powerpoint/2010/main">
-        <p14:section name="한 장 요약" id="{bdf50577-0f39-99e3-1842-ee00afd8bdba}">
+        <p14:section name="한 장 요약" id="{b26606b7-5075-61e1-cba7-66ed2e481898}">
           <p14:sldIdLst>
             <p14:sldId id="256"/>
           </p14:sldIdLst>
@@ -934,13 +934,13 @@
               <a:buNone/>
             </a:pPr>
             <a:r>
-              <a:rPr lang="ko-KR" altLang="en-US" sz="2000" dirty="0">
+              <a:rPr lang="ko-KR" altLang="en-US" sz="2000" b="1" dirty="0">
                 <a:solidFill>
                   <a:srgbClr val="FFFFFF"/>
                 </a:solidFill>
-                <a:latin typeface="S-Core Dream 7 ExtraBold" pitchFamily="34" charset="0"/>
-                <a:ea typeface="S-Core Dream 7 ExtraBold" pitchFamily="34" charset="-127"/>
-                <a:cs typeface="S-Core Dream 7 ExtraBold" pitchFamily="34" charset="-120"/>
+                <a:latin typeface="Pretendard" pitchFamily="34" charset="0"/>
+                <a:ea typeface="Pretendard" pitchFamily="34" charset="-127"/>
+                <a:cs typeface="Pretendard" pitchFamily="34" charset="-120"/>
               </a:rPr>
               <a:t>01</a:t>
             </a:r>
@@ -977,9 +977,9 @@
                 <a:solidFill>
                   <a:srgbClr val="2E7D8C"/>
                 </a:solidFill>
-                <a:latin typeface="S-Core Dream 5 Medium" pitchFamily="34" charset="0"/>
-                <a:ea typeface="S-Core Dream 5 Medium" pitchFamily="34" charset="-127"/>
-                <a:cs typeface="S-Core Dream 5 Medium" pitchFamily="34" charset="-120"/>
+                <a:latin typeface="Pretendard SemiBold" pitchFamily="34" charset="0"/>
+                <a:ea typeface="Pretendard SemiBold" pitchFamily="34" charset="-127"/>
+                <a:cs typeface="Pretendard SemiBold" pitchFamily="34" charset="-120"/>
               </a:rPr>
               <a:t>KOHOM 뉴스룸 · 한 장 요약</a:t>
             </a:r>
@@ -1012,13 +1012,13 @@
               <a:buNone/>
             </a:pPr>
             <a:r>
-              <a:rPr lang="ko-KR" altLang="en-US" sz="2600" dirty="0">
+              <a:rPr lang="ko-KR" altLang="en-US" sz="2600" b="1" dirty="0">
                 <a:solidFill>
                   <a:srgbClr val="1F3B5C"/>
                 </a:solidFill>
-                <a:latin typeface="S-Core Dream 7 ExtraBold" pitchFamily="34" charset="0"/>
-                <a:ea typeface="S-Core Dream 7 ExtraBold" pitchFamily="34" charset="-127"/>
-                <a:cs typeface="S-Core Dream 7 ExtraBold" pitchFamily="34" charset="-120"/>
+                <a:latin typeface="Pretendard" pitchFamily="34" charset="0"/>
+                <a:ea typeface="Pretendard" pitchFamily="34" charset="-127"/>
+                <a:cs typeface="Pretendard" pitchFamily="34" charset="-120"/>
               </a:rPr>
               <a:t>매일 언론보도 보고, 버튼 네 번이면 끝</a:t>
             </a:r>
@@ -1055,9 +1055,9 @@
                 <a:solidFill>
                   <a:srgbClr val="667385"/>
                 </a:solidFill>
-                <a:latin typeface="S-Core Dream 4 Regular" pitchFamily="34" charset="0"/>
-                <a:ea typeface="S-Core Dream 4 Regular" pitchFamily="34" charset="-127"/>
-                <a:cs typeface="S-Core Dream 4 Regular" pitchFamily="34" charset="-120"/>
+                <a:latin typeface="Pretendard" pitchFamily="34" charset="0"/>
+                <a:ea typeface="Pretendard" pitchFamily="34" charset="-127"/>
+                <a:cs typeface="Pretendard" pitchFamily="34" charset="-120"/>
               </a:rPr>
               <a:t>베이직 탭 기준 · 앱 v1.0.8 · 설치는 exe 파일 하나(윈도우 경고가 뜨면 [추가 정보] → [실행])</a:t>
             </a:r>
@@ -1145,9 +1145,9 @@
                 <a:solidFill>
                   <a:srgbClr val="1F3B5C"/>
                 </a:solidFill>
-                <a:latin typeface="S-Core Dream 5 Medium" pitchFamily="34" charset="0"/>
-                <a:ea typeface="S-Core Dream 5 Medium" pitchFamily="34" charset="-127"/>
-                <a:cs typeface="S-Core Dream 5 Medium" pitchFamily="34" charset="-120"/>
+                <a:latin typeface="Pretendard SemiBold" pitchFamily="34" charset="0"/>
+                <a:ea typeface="Pretendard SemiBold" pitchFamily="34" charset="-127"/>
+                <a:cs typeface="Pretendard SemiBold" pitchFamily="34" charset="-120"/>
               </a:rPr>
               <a:t>① 조회</a:t>
             </a:r>
@@ -1188,9 +1188,9 @@
                 <a:solidFill>
                   <a:srgbClr val="1E2A36"/>
                 </a:solidFill>
-                <a:latin typeface="S-Core Dream 4 Regular" pitchFamily="34" charset="0"/>
-                <a:ea typeface="S-Core Dream 4 Regular" pitchFamily="34" charset="-127"/>
-                <a:cs typeface="S-Core Dream 4 Regular" pitchFamily="34" charset="-120"/>
+                <a:latin typeface="Pretendard" pitchFamily="34" charset="0"/>
+                <a:ea typeface="Pretendard" pitchFamily="34" charset="-127"/>
+                <a:cs typeface="Pretendard" pitchFamily="34" charset="-120"/>
               </a:rPr>
               <a:t>기간은 자동(직전 영업일 9시~)</a:t>
             </a:r>
@@ -1209,9 +1209,9 @@
                 <a:solidFill>
                   <a:srgbClr val="1E2A36"/>
                 </a:solidFill>
-                <a:latin typeface="S-Core Dream 4 Regular" pitchFamily="34" charset="0"/>
-                <a:ea typeface="S-Core Dream 4 Regular" pitchFamily="34" charset="-127"/>
-                <a:cs typeface="S-Core Dream 4 Regular" pitchFamily="34" charset="-120"/>
+                <a:latin typeface="Pretendard" pitchFamily="34" charset="0"/>
+                <a:ea typeface="Pretendard" pitchFamily="34" charset="-127"/>
+                <a:cs typeface="Pretendard" pitchFamily="34" charset="-120"/>
               </a:rPr>
               <a:t>[조회] 누르기</a:t>
             </a:r>
@@ -1230,9 +1230,9 @@
                 <a:solidFill>
                   <a:srgbClr val="1E2A36"/>
                 </a:solidFill>
-                <a:latin typeface="S-Core Dream 4 Regular" pitchFamily="34" charset="0"/>
-                <a:ea typeface="S-Core Dream 4 Regular" pitchFamily="34" charset="-127"/>
-                <a:cs typeface="S-Core Dream 4 Regular" pitchFamily="34" charset="-120"/>
+                <a:latin typeface="Pretendard" pitchFamily="34" charset="0"/>
+                <a:ea typeface="Pretendard" pitchFamily="34" charset="-127"/>
+                <a:cs typeface="Pretendard" pitchFamily="34" charset="-120"/>
               </a:rPr>
               <a:t>잘못 눌렀으면 ■ 정지</a:t>
             </a:r>
@@ -1344,9 +1344,9 @@
                 <a:solidFill>
                   <a:srgbClr val="1F3B5C"/>
                 </a:solidFill>
-                <a:latin typeface="S-Core Dream 5 Medium" pitchFamily="34" charset="0"/>
-                <a:ea typeface="S-Core Dream 5 Medium" pitchFamily="34" charset="-127"/>
-                <a:cs typeface="S-Core Dream 5 Medium" pitchFamily="34" charset="-120"/>
+                <a:latin typeface="Pretendard SemiBold" pitchFamily="34" charset="0"/>
+                <a:ea typeface="Pretendard SemiBold" pitchFamily="34" charset="-127"/>
+                <a:cs typeface="Pretendard SemiBold" pitchFamily="34" charset="-120"/>
               </a:rPr>
               <a:t>② 추천 확인</a:t>
             </a:r>
@@ -1387,9 +1387,9 @@
                 <a:solidFill>
                   <a:srgbClr val="1E2A36"/>
                 </a:solidFill>
-                <a:latin typeface="S-Core Dream 4 Regular" pitchFamily="34" charset="0"/>
-                <a:ea typeface="S-Core Dream 4 Regular" pitchFamily="34" charset="-127"/>
-                <a:cs typeface="S-Core Dream 4 Regular" pitchFamily="34" charset="-120"/>
+                <a:latin typeface="Pretendard" pitchFamily="34" charset="0"/>
+                <a:ea typeface="Pretendard" pitchFamily="34" charset="-127"/>
+                <a:cs typeface="Pretendard" pitchFamily="34" charset="-120"/>
               </a:rPr>
               <a:t>★추천 5건이 미리 선택</a:t>
             </a:r>
@@ -1408,9 +1408,9 @@
                 <a:solidFill>
                   <a:srgbClr val="1E2A36"/>
                 </a:solidFill>
-                <a:latin typeface="S-Core Dream 4 Regular" pitchFamily="34" charset="0"/>
-                <a:ea typeface="S-Core Dream 4 Regular" pitchFamily="34" charset="-127"/>
-                <a:cs typeface="S-Core Dream 4 Regular" pitchFamily="34" charset="-120"/>
+                <a:latin typeface="Pretendard" pitchFamily="34" charset="0"/>
+                <a:ea typeface="Pretendard" pitchFamily="34" charset="-127"/>
+                <a:cs typeface="Pretendard" pitchFamily="34" charset="-120"/>
               </a:rPr>
               <a:t>선택 칸으로 넣고 빼기</a:t>
             </a:r>
@@ -1429,9 +1429,9 @@
                 <a:solidFill>
                   <a:srgbClr val="1E2A36"/>
                 </a:solidFill>
-                <a:latin typeface="S-Core Dream 4 Regular" pitchFamily="34" charset="0"/>
-                <a:ea typeface="S-Core Dream 4 Regular" pitchFamily="34" charset="-127"/>
-                <a:cs typeface="S-Core Dream 4 Regular" pitchFamily="34" charset="-120"/>
+                <a:latin typeface="Pretendard" pitchFamily="34" charset="0"/>
+                <a:ea typeface="Pretendard" pitchFamily="34" charset="-127"/>
+                <a:cs typeface="Pretendard" pitchFamily="34" charset="-120"/>
               </a:rPr>
               <a:t>제목을 끌어 순서 정하기</a:t>
             </a:r>
@@ -1543,9 +1543,9 @@
                 <a:solidFill>
                   <a:srgbClr val="1F3B5C"/>
                 </a:solidFill>
-                <a:latin typeface="S-Core Dream 5 Medium" pitchFamily="34" charset="0"/>
-                <a:ea typeface="S-Core Dream 5 Medium" pitchFamily="34" charset="-127"/>
-                <a:cs typeface="S-Core Dream 5 Medium" pitchFamily="34" charset="-120"/>
+                <a:latin typeface="Pretendard SemiBold" pitchFamily="34" charset="0"/>
+                <a:ea typeface="Pretendard SemiBold" pitchFamily="34" charset="-127"/>
+                <a:cs typeface="Pretendard SemiBold" pitchFamily="34" charset="-120"/>
               </a:rPr>
               <a:t>③ 보고서</a:t>
             </a:r>
@@ -1586,9 +1586,9 @@
                 <a:solidFill>
                   <a:srgbClr val="1E2A36"/>
                 </a:solidFill>
-                <a:latin typeface="S-Core Dream 4 Regular" pitchFamily="34" charset="0"/>
-                <a:ea typeface="S-Core Dream 4 Regular" pitchFamily="34" charset="-127"/>
-                <a:cs typeface="S-Core Dream 4 Regular" pitchFamily="34" charset="-120"/>
+                <a:latin typeface="Pretendard" pitchFamily="34" charset="0"/>
+                <a:ea typeface="Pretendard" pitchFamily="34" charset="-127"/>
+                <a:cs typeface="Pretendard" pitchFamily="34" charset="-120"/>
               </a:rPr>
               <a:t>[HTML 보고서 열기]</a:t>
             </a:r>
@@ -1607,9 +1607,9 @@
                 <a:solidFill>
                   <a:srgbClr val="1E2A36"/>
                 </a:solidFill>
-                <a:latin typeface="S-Core Dream 4 Regular" pitchFamily="34" charset="0"/>
-                <a:ea typeface="S-Core Dream 4 Regular" pitchFamily="34" charset="-127"/>
-                <a:cs typeface="S-Core Dream 4 Regular" pitchFamily="34" charset="-120"/>
+                <a:latin typeface="Pretendard" pitchFamily="34" charset="0"/>
+                <a:ea typeface="Pretendard" pitchFamily="34" charset="-127"/>
+                <a:cs typeface="Pretendard" pitchFamily="34" charset="-120"/>
               </a:rPr>
               <a:t>[제목 복사]·[본문 복사]</a:t>
             </a:r>
@@ -1628,9 +1628,9 @@
                 <a:solidFill>
                   <a:srgbClr val="1E2A36"/>
                 </a:solidFill>
-                <a:latin typeface="S-Core Dream 4 Regular" pitchFamily="34" charset="0"/>
-                <a:ea typeface="S-Core Dream 4 Regular" pitchFamily="34" charset="-127"/>
-                <a:cs typeface="S-Core Dream 4 Regular" pitchFamily="34" charset="-120"/>
+                <a:latin typeface="Pretendard" pitchFamily="34" charset="0"/>
+                <a:ea typeface="Pretendard" pitchFamily="34" charset="-127"/>
+                <a:cs typeface="Pretendard" pitchFamily="34" charset="-120"/>
               </a:rPr>
               <a:t>그룹웨어 편지쓰기에 붙여넣기</a:t>
             </a:r>
@@ -1742,9 +1742,9 @@
                 <a:solidFill>
                   <a:srgbClr val="1F3B5C"/>
                 </a:solidFill>
-                <a:latin typeface="S-Core Dream 5 Medium" pitchFamily="34" charset="0"/>
-                <a:ea typeface="S-Core Dream 5 Medium" pitchFamily="34" charset="-127"/>
-                <a:cs typeface="S-Core Dream 5 Medium" pitchFamily="34" charset="-120"/>
+                <a:latin typeface="Pretendard SemiBold" pitchFamily="34" charset="0"/>
+                <a:ea typeface="Pretendard SemiBold" pitchFamily="34" charset="-127"/>
+                <a:cs typeface="Pretendard SemiBold" pitchFamily="34" charset="-120"/>
               </a:rPr>
               <a:t>④ 기록</a:t>
             </a:r>
@@ -1785,9 +1785,9 @@
                 <a:solidFill>
                   <a:srgbClr val="1E2A36"/>
                 </a:solidFill>
-                <a:latin typeface="S-Core Dream 4 Regular" pitchFamily="34" charset="0"/>
-                <a:ea typeface="S-Core Dream 4 Regular" pitchFamily="34" charset="-127"/>
-                <a:cs typeface="S-Core Dream 4 Regular" pitchFamily="34" charset="-120"/>
+                <a:latin typeface="Pretendard" pitchFamily="34" charset="0"/>
+                <a:ea typeface="Pretendard" pitchFamily="34" charset="-127"/>
+                <a:cs typeface="Pretendard" pitchFamily="34" charset="-120"/>
               </a:rPr>
               <a:t>메일을 보낸 뒤</a:t>
             </a:r>
@@ -1806,9 +1806,9 @@
                 <a:solidFill>
                   <a:srgbClr val="1E2A36"/>
                 </a:solidFill>
-                <a:latin typeface="S-Core Dream 4 Regular" pitchFamily="34" charset="0"/>
-                <a:ea typeface="S-Core Dream 4 Regular" pitchFamily="34" charset="-127"/>
-                <a:cs typeface="S-Core Dream 4 Regular" pitchFamily="34" charset="-120"/>
+                <a:latin typeface="Pretendard" pitchFamily="34" charset="0"/>
+                <a:ea typeface="Pretendard" pitchFamily="34" charset="-127"/>
+                <a:cs typeface="Pretendard" pitchFamily="34" charset="-120"/>
               </a:rPr>
               <a:t>[보고 완료로 기록]</a:t>
             </a:r>
@@ -1827,9 +1827,9 @@
                 <a:solidFill>
                   <a:srgbClr val="1E2A36"/>
                 </a:solidFill>
-                <a:latin typeface="S-Core Dream 4 Regular" pitchFamily="34" charset="0"/>
-                <a:ea typeface="S-Core Dream 4 Regular" pitchFamily="34" charset="-127"/>
-                <a:cs typeface="S-Core Dream 4 Regular" pitchFamily="34" charset="-120"/>
+                <a:latin typeface="Pretendard" pitchFamily="34" charset="0"/>
+                <a:ea typeface="Pretendard" pitchFamily="34" charset="-127"/>
+                <a:cs typeface="Pretendard" pitchFamily="34" charset="-120"/>
               </a:rPr>
               <a:t>다음 조회에서 자동 제외</a:t>
             </a:r>
@@ -1917,9 +1917,9 @@
                 <a:solidFill>
                   <a:srgbClr val="1F3B5C"/>
                 </a:solidFill>
-                <a:latin typeface="S-Core Dream 5 Medium" pitchFamily="34" charset="0"/>
-                <a:ea typeface="S-Core Dream 5 Medium" pitchFamily="34" charset="-127"/>
-                <a:cs typeface="S-Core Dream 5 Medium" pitchFamily="34" charset="-120"/>
+                <a:latin typeface="Pretendard SemiBold" pitchFamily="34" charset="0"/>
+                <a:ea typeface="Pretendard SemiBold" pitchFamily="34" charset="-127"/>
+                <a:cs typeface="Pretendard SemiBold" pitchFamily="34" charset="-120"/>
               </a:rPr>
               <a:t>업데이트</a:t>
             </a:r>
@@ -1959,9 +1959,9 @@
                 <a:solidFill>
                   <a:srgbClr val="1E2A36"/>
                 </a:solidFill>
-                <a:latin typeface="S-Core Dream 4 Regular" pitchFamily="34" charset="0"/>
-                <a:ea typeface="S-Core Dream 4 Regular" pitchFamily="34" charset="-127"/>
-                <a:cs typeface="S-Core Dream 4 Regular" pitchFamily="34" charset="-120"/>
+                <a:latin typeface="Pretendard" pitchFamily="34" charset="0"/>
+                <a:ea typeface="Pretendard" pitchFamily="34" charset="-127"/>
+                <a:cs typeface="Pretendard" pitchFamily="34" charset="-120"/>
               </a:rPr>
               <a:t>켤 때 새 버전 알림 → [예]. GitHub이 막힌 PC는 공문 경로에서 새 파일로</a:t>
             </a:r>
@@ -2049,9 +2049,9 @@
                 <a:solidFill>
                   <a:srgbClr val="1F3B5C"/>
                 </a:solidFill>
-                <a:latin typeface="S-Core Dream 5 Medium" pitchFamily="34" charset="0"/>
-                <a:ea typeface="S-Core Dream 5 Medium" pitchFamily="34" charset="-127"/>
-                <a:cs typeface="S-Core Dream 5 Medium" pitchFamily="34" charset="-120"/>
+                <a:latin typeface="Pretendard SemiBold" pitchFamily="34" charset="0"/>
+                <a:ea typeface="Pretendard SemiBold" pitchFamily="34" charset="-127"/>
+                <a:cs typeface="Pretendard SemiBold" pitchFamily="34" charset="-120"/>
               </a:rPr>
               <a:t>기사 추가</a:t>
             </a:r>
@@ -2091,9 +2091,9 @@
                 <a:solidFill>
                   <a:srgbClr val="1E2A36"/>
                 </a:solidFill>
-                <a:latin typeface="S-Core Dream 4 Regular" pitchFamily="34" charset="0"/>
-                <a:ea typeface="S-Core Dream 4 Regular" pitchFamily="34" charset="-127"/>
-                <a:cs typeface="S-Core Dream 4 Regular" pitchFamily="34" charset="-120"/>
+                <a:latin typeface="Pretendard" pitchFamily="34" charset="0"/>
+                <a:ea typeface="Pretendard" pitchFamily="34" charset="-127"/>
+                <a:cs typeface="Pretendard" pitchFamily="34" charset="-120"/>
               </a:rPr>
               <a:t>검색에 없는 기사는 [＋ 기사 링크로 추가]에 주소 붙여넣기</a:t>
             </a:r>
@@ -2181,9 +2181,9 @@
                 <a:solidFill>
                   <a:srgbClr val="1F3B5C"/>
                 </a:solidFill>
-                <a:latin typeface="S-Core Dream 5 Medium" pitchFamily="34" charset="0"/>
-                <a:ea typeface="S-Core Dream 5 Medium" pitchFamily="34" charset="-127"/>
-                <a:cs typeface="S-Core Dream 5 Medium" pitchFamily="34" charset="-120"/>
+                <a:latin typeface="Pretendard SemiBold" pitchFamily="34" charset="0"/>
+                <a:ea typeface="Pretendard SemiBold" pitchFamily="34" charset="-127"/>
+                <a:cs typeface="Pretendard SemiBold" pitchFamily="34" charset="-120"/>
               </a:rPr>
               <a:t>지난 기록</a:t>
             </a:r>
@@ -2223,9 +2223,9 @@
                 <a:solidFill>
                   <a:srgbClr val="1E2A36"/>
                 </a:solidFill>
-                <a:latin typeface="S-Core Dream 4 Regular" pitchFamily="34" charset="0"/>
-                <a:ea typeface="S-Core Dream 4 Regular" pitchFamily="34" charset="-127"/>
-                <a:cs typeface="S-Core Dream 4 Regular" pitchFamily="34" charset="-120"/>
+                <a:latin typeface="Pretendard" pitchFamily="34" charset="0"/>
+                <a:ea typeface="Pretendard" pitchFamily="34" charset="-127"/>
+                <a:cs typeface="Pretendard" pitchFamily="34" charset="-120"/>
               </a:rPr>
               <a:t>[보고 기록] 탭에서 날짜별 확인·보고서 다시 열기</a:t>
             </a:r>
@@ -2284,7 +2284,7 @@
     </a:clrScheme>
     <a:fontScheme name="Office">
       <a:majorFont>
-        <a:latin typeface="S-Core Dream 7 ExtraBold"/>
+        <a:latin typeface="Pretendard"/>
         <a:ea typeface=""/>
         <a:cs typeface=""/>
         <a:font script="Jpan" typeface="游ゴシック Light"/>
@@ -2336,7 +2336,7 @@
         <a:font script="Tfng" typeface="Ebrima"/>
       </a:majorFont>
       <a:minorFont>
-        <a:latin typeface="S-Core Dream 4 Regular"/>
+        <a:latin typeface="Pretendard"/>
         <a:ea typeface=""/>
         <a:cs typeface=""/>
         <a:font script="Jpan" typeface="游ゴシック"/>
